--- a/ゲーム科3年/00_前期/オンラインゲームプログラミングⅠ/01_接続(サーバー).pptx
+++ b/ゲーム科3年/00_前期/オンラインゲームプログラミングⅠ/01_接続(サーバー).pptx
@@ -10,6 +10,10 @@
     <p:sldId id="258" r:id="rId4"/>
     <p:sldId id="259" r:id="rId5"/>
     <p:sldId id="260" r:id="rId6"/>
+    <p:sldId id="261" r:id="rId7"/>
+    <p:sldId id="262" r:id="rId8"/>
+    <p:sldId id="263" r:id="rId9"/>
+    <p:sldId id="264" r:id="rId10"/>
   </p:sldIdLst>
   <p:sldSz cx="12192000" cy="6858000"/>
   <p:notesSz cx="6858000" cy="9144000"/>
@@ -263,7 +267,7 @@
           <a:p>
             <a:fld id="{E9CC885B-4903-4D54-9A93-00025F12DED9}" type="datetimeFigureOut">
               <a:rPr kumimoji="1" lang="ja-JP" altLang="en-US" smtClean="0"/>
-              <a:t>2025/8/18</a:t>
+              <a:t>2025/8/22</a:t>
             </a:fld>
             <a:endParaRPr kumimoji="1" lang="ja-JP" altLang="en-US"/>
           </a:p>
@@ -493,7 +497,7 @@
           <a:p>
             <a:fld id="{E9CC885B-4903-4D54-9A93-00025F12DED9}" type="datetimeFigureOut">
               <a:rPr kumimoji="1" lang="ja-JP" altLang="en-US" smtClean="0"/>
-              <a:t>2025/8/18</a:t>
+              <a:t>2025/8/22</a:t>
             </a:fld>
             <a:endParaRPr kumimoji="1" lang="ja-JP" altLang="en-US"/>
           </a:p>
@@ -733,7 +737,7 @@
           <a:p>
             <a:fld id="{E9CC885B-4903-4D54-9A93-00025F12DED9}" type="datetimeFigureOut">
               <a:rPr kumimoji="1" lang="ja-JP" altLang="en-US" smtClean="0"/>
-              <a:t>2025/8/18</a:t>
+              <a:t>2025/8/22</a:t>
             </a:fld>
             <a:endParaRPr kumimoji="1" lang="ja-JP" altLang="en-US"/>
           </a:p>
@@ -963,7 +967,7 @@
           <a:p>
             <a:fld id="{E9CC885B-4903-4D54-9A93-00025F12DED9}" type="datetimeFigureOut">
               <a:rPr kumimoji="1" lang="ja-JP" altLang="en-US" smtClean="0"/>
-              <a:t>2025/8/18</a:t>
+              <a:t>2025/8/22</a:t>
             </a:fld>
             <a:endParaRPr kumimoji="1" lang="ja-JP" altLang="en-US"/>
           </a:p>
@@ -1238,7 +1242,7 @@
           <a:p>
             <a:fld id="{E9CC885B-4903-4D54-9A93-00025F12DED9}" type="datetimeFigureOut">
               <a:rPr kumimoji="1" lang="ja-JP" altLang="en-US" smtClean="0"/>
-              <a:t>2025/8/18</a:t>
+              <a:t>2025/8/22</a:t>
             </a:fld>
             <a:endParaRPr kumimoji="1" lang="ja-JP" altLang="en-US"/>
           </a:p>
@@ -1567,7 +1571,7 @@
           <a:p>
             <a:fld id="{E9CC885B-4903-4D54-9A93-00025F12DED9}" type="datetimeFigureOut">
               <a:rPr kumimoji="1" lang="ja-JP" altLang="en-US" smtClean="0"/>
-              <a:t>2025/8/18</a:t>
+              <a:t>2025/8/22</a:t>
             </a:fld>
             <a:endParaRPr kumimoji="1" lang="ja-JP" altLang="en-US"/>
           </a:p>
@@ -2043,7 +2047,7 @@
           <a:p>
             <a:fld id="{E9CC885B-4903-4D54-9A93-00025F12DED9}" type="datetimeFigureOut">
               <a:rPr kumimoji="1" lang="ja-JP" altLang="en-US" smtClean="0"/>
-              <a:t>2025/8/18</a:t>
+              <a:t>2025/8/22</a:t>
             </a:fld>
             <a:endParaRPr kumimoji="1" lang="ja-JP" altLang="en-US"/>
           </a:p>
@@ -2184,7 +2188,7 @@
           <a:p>
             <a:fld id="{E9CC885B-4903-4D54-9A93-00025F12DED9}" type="datetimeFigureOut">
               <a:rPr kumimoji="1" lang="ja-JP" altLang="en-US" smtClean="0"/>
-              <a:t>2025/8/18</a:t>
+              <a:t>2025/8/22</a:t>
             </a:fld>
             <a:endParaRPr kumimoji="1" lang="ja-JP" altLang="en-US"/>
           </a:p>
@@ -2297,7 +2301,7 @@
           <a:p>
             <a:fld id="{E9CC885B-4903-4D54-9A93-00025F12DED9}" type="datetimeFigureOut">
               <a:rPr kumimoji="1" lang="ja-JP" altLang="en-US" smtClean="0"/>
-              <a:t>2025/8/18</a:t>
+              <a:t>2025/8/22</a:t>
             </a:fld>
             <a:endParaRPr kumimoji="1" lang="ja-JP" altLang="en-US"/>
           </a:p>
@@ -2640,7 +2644,7 @@
           <a:p>
             <a:fld id="{E9CC885B-4903-4D54-9A93-00025F12DED9}" type="datetimeFigureOut">
               <a:rPr kumimoji="1" lang="ja-JP" altLang="en-US" smtClean="0"/>
-              <a:t>2025/8/18</a:t>
+              <a:t>2025/8/22</a:t>
             </a:fld>
             <a:endParaRPr kumimoji="1" lang="ja-JP" altLang="en-US"/>
           </a:p>
@@ -2928,7 +2932,7 @@
           <a:p>
             <a:fld id="{E9CC885B-4903-4D54-9A93-00025F12DED9}" type="datetimeFigureOut">
               <a:rPr kumimoji="1" lang="ja-JP" altLang="en-US" smtClean="0"/>
-              <a:t>2025/8/18</a:t>
+              <a:t>2025/8/22</a:t>
             </a:fld>
             <a:endParaRPr kumimoji="1" lang="ja-JP" altLang="en-US"/>
           </a:p>
@@ -3201,7 +3205,7 @@
           <a:p>
             <a:fld id="{E9CC885B-4903-4D54-9A93-00025F12DED9}" type="datetimeFigureOut">
               <a:rPr kumimoji="1" lang="ja-JP" altLang="en-US" smtClean="0"/>
-              <a:t>2025/8/18</a:t>
+              <a:t>2025/8/22</a:t>
             </a:fld>
             <a:endParaRPr kumimoji="1" lang="ja-JP" altLang="en-US"/>
           </a:p>
@@ -4619,6 +4623,727 @@
 </p:sld>
 </file>
 
+<file path=ppt/slides/slide6.xml><?xml version="1.0" encoding="utf-8"?>
+<p:sld xmlns:a="http://schemas.openxmlformats.org/drawingml/2006/main" xmlns:r="http://schemas.openxmlformats.org/officeDocument/2006/relationships" xmlns:p="http://schemas.openxmlformats.org/presentationml/2006/main">
+  <p:cSld>
+    <p:spTree>
+      <p:nvGrpSpPr>
+        <p:cNvPr id="1" name=""/>
+        <p:cNvGrpSpPr/>
+        <p:nvPr/>
+      </p:nvGrpSpPr>
+      <p:grpSpPr>
+        <a:xfrm>
+          <a:off x="0" y="0"/>
+          <a:ext cx="0" cy="0"/>
+          <a:chOff x="0" y="0"/>
+          <a:chExt cx="0" cy="0"/>
+        </a:xfrm>
+      </p:grpSpPr>
+      <p:sp>
+        <p:nvSpPr>
+          <p:cNvPr id="4" name="テキスト ボックス 3">
+            <a:extLst>
+              <a:ext uri="{FF2B5EF4-FFF2-40B4-BE49-F238E27FC236}">
+                <a16:creationId xmlns:a16="http://schemas.microsoft.com/office/drawing/2014/main" id="{5A13BF46-B8C5-48AA-8308-C9ECFF431A18}"/>
+              </a:ext>
+            </a:extLst>
+          </p:cNvPr>
+          <p:cNvSpPr txBox="1"/>
+          <p:nvPr/>
+        </p:nvSpPr>
+        <p:spPr>
+          <a:xfrm>
+            <a:off x="567542" y="491954"/>
+            <a:ext cx="3467616" cy="584775"/>
+          </a:xfrm>
+          <a:prstGeom prst="rect">
+            <a:avLst/>
+          </a:prstGeom>
+          <a:noFill/>
+        </p:spPr>
+        <p:txBody>
+          <a:bodyPr wrap="none" rtlCol="0">
+            <a:spAutoFit/>
+          </a:bodyPr>
+          <a:lstStyle/>
+          <a:p>
+            <a:r>
+              <a:rPr kumimoji="1" lang="ja-JP" altLang="en-US" sz="3200" b="1" u="sng" dirty="0"/>
+              <a:t>接続（サーバー）</a:t>
+            </a:r>
+          </a:p>
+        </p:txBody>
+      </p:sp>
+      <p:sp>
+        <p:nvSpPr>
+          <p:cNvPr id="6" name="テキスト ボックス 5">
+            <a:extLst>
+              <a:ext uri="{FF2B5EF4-FFF2-40B4-BE49-F238E27FC236}">
+                <a16:creationId xmlns:a16="http://schemas.microsoft.com/office/drawing/2014/main" id="{55830AD6-028B-4C4E-80BF-B70DFC1C3A46}"/>
+              </a:ext>
+            </a:extLst>
+          </p:cNvPr>
+          <p:cNvSpPr txBox="1"/>
+          <p:nvPr/>
+        </p:nvSpPr>
+        <p:spPr>
+          <a:xfrm>
+            <a:off x="567542" y="1216429"/>
+            <a:ext cx="7571303" cy="461665"/>
+          </a:xfrm>
+          <a:prstGeom prst="rect">
+            <a:avLst/>
+          </a:prstGeom>
+          <a:noFill/>
+        </p:spPr>
+        <p:txBody>
+          <a:bodyPr wrap="none" rtlCol="0">
+            <a:spAutoFit/>
+          </a:bodyPr>
+          <a:lstStyle/>
+          <a:p>
+            <a:r>
+              <a:rPr kumimoji="1" lang="ja-JP" altLang="en-US" sz="2400" dirty="0"/>
+              <a:t>ユーザーデータは構造体にしておくと良いでしょう。</a:t>
+            </a:r>
+            <a:endParaRPr kumimoji="1" lang="en-US" altLang="ja-JP" sz="2400" dirty="0"/>
+          </a:p>
+        </p:txBody>
+      </p:sp>
+      <p:pic>
+        <p:nvPicPr>
+          <p:cNvPr id="5" name="図 4">
+            <a:extLst>
+              <a:ext uri="{FF2B5EF4-FFF2-40B4-BE49-F238E27FC236}">
+                <a16:creationId xmlns:a16="http://schemas.microsoft.com/office/drawing/2014/main" id="{079FDAAC-7768-4411-B746-9B6B24476131}"/>
+              </a:ext>
+            </a:extLst>
+          </p:cNvPr>
+          <p:cNvPicPr>
+            <a:picLocks noChangeAspect="1"/>
+          </p:cNvPicPr>
+          <p:nvPr/>
+        </p:nvPicPr>
+        <p:blipFill>
+          <a:blip r:embed="rId2"/>
+          <a:stretch>
+            <a:fillRect/>
+          </a:stretch>
+        </p:blipFill>
+        <p:spPr>
+          <a:xfrm>
+            <a:off x="567541" y="1817794"/>
+            <a:ext cx="3382659" cy="1306406"/>
+          </a:xfrm>
+          <a:prstGeom prst="rect">
+            <a:avLst/>
+          </a:prstGeom>
+        </p:spPr>
+      </p:pic>
+      <p:pic>
+        <p:nvPicPr>
+          <p:cNvPr id="8" name="図 7">
+            <a:extLst>
+              <a:ext uri="{FF2B5EF4-FFF2-40B4-BE49-F238E27FC236}">
+                <a16:creationId xmlns:a16="http://schemas.microsoft.com/office/drawing/2014/main" id="{11CF956B-18B8-4C7C-85D4-D2FA4F835AAE}"/>
+              </a:ext>
+            </a:extLst>
+          </p:cNvPr>
+          <p:cNvPicPr>
+            <a:picLocks noChangeAspect="1"/>
+          </p:cNvPicPr>
+          <p:nvPr/>
+        </p:nvPicPr>
+        <p:blipFill>
+          <a:blip r:embed="rId3"/>
+          <a:stretch>
+            <a:fillRect/>
+          </a:stretch>
+        </p:blipFill>
+        <p:spPr>
+          <a:xfrm>
+            <a:off x="567541" y="3365500"/>
+            <a:ext cx="7116168" cy="3172268"/>
+          </a:xfrm>
+          <a:prstGeom prst="rect">
+            <a:avLst/>
+          </a:prstGeom>
+        </p:spPr>
+      </p:pic>
+    </p:spTree>
+    <p:extLst>
+      <p:ext uri="{BB962C8B-B14F-4D97-AF65-F5344CB8AC3E}">
+        <p14:creationId xmlns:p14="http://schemas.microsoft.com/office/powerpoint/2010/main" val="1597987641"/>
+      </p:ext>
+    </p:extLst>
+  </p:cSld>
+  <p:clrMapOvr>
+    <a:masterClrMapping/>
+  </p:clrMapOvr>
+</p:sld>
+</file>
+
+<file path=ppt/slides/slide7.xml><?xml version="1.0" encoding="utf-8"?>
+<p:sld xmlns:a="http://schemas.openxmlformats.org/drawingml/2006/main" xmlns:r="http://schemas.openxmlformats.org/officeDocument/2006/relationships" xmlns:p="http://schemas.openxmlformats.org/presentationml/2006/main">
+  <p:cSld>
+    <p:spTree>
+      <p:nvGrpSpPr>
+        <p:cNvPr id="1" name=""/>
+        <p:cNvGrpSpPr/>
+        <p:nvPr/>
+      </p:nvGrpSpPr>
+      <p:grpSpPr>
+        <a:xfrm>
+          <a:off x="0" y="0"/>
+          <a:ext cx="0" cy="0"/>
+          <a:chOff x="0" y="0"/>
+          <a:chExt cx="0" cy="0"/>
+        </a:xfrm>
+      </p:grpSpPr>
+      <p:sp>
+        <p:nvSpPr>
+          <p:cNvPr id="4" name="テキスト ボックス 3">
+            <a:extLst>
+              <a:ext uri="{FF2B5EF4-FFF2-40B4-BE49-F238E27FC236}">
+                <a16:creationId xmlns:a16="http://schemas.microsoft.com/office/drawing/2014/main" id="{5A13BF46-B8C5-48AA-8308-C9ECFF431A18}"/>
+              </a:ext>
+            </a:extLst>
+          </p:cNvPr>
+          <p:cNvSpPr txBox="1"/>
+          <p:nvPr/>
+        </p:nvSpPr>
+        <p:spPr>
+          <a:xfrm>
+            <a:off x="567542" y="491954"/>
+            <a:ext cx="3467616" cy="584775"/>
+          </a:xfrm>
+          <a:prstGeom prst="rect">
+            <a:avLst/>
+          </a:prstGeom>
+          <a:noFill/>
+        </p:spPr>
+        <p:txBody>
+          <a:bodyPr wrap="none" rtlCol="0">
+            <a:spAutoFit/>
+          </a:bodyPr>
+          <a:lstStyle/>
+          <a:p>
+            <a:r>
+              <a:rPr kumimoji="1" lang="ja-JP" altLang="en-US" sz="3200" b="1" u="sng" dirty="0"/>
+              <a:t>接続（サーバー）</a:t>
+            </a:r>
+          </a:p>
+        </p:txBody>
+      </p:sp>
+      <p:sp>
+        <p:nvSpPr>
+          <p:cNvPr id="6" name="テキスト ボックス 5">
+            <a:extLst>
+              <a:ext uri="{FF2B5EF4-FFF2-40B4-BE49-F238E27FC236}">
+                <a16:creationId xmlns:a16="http://schemas.microsoft.com/office/drawing/2014/main" id="{55830AD6-028B-4C4E-80BF-B70DFC1C3A46}"/>
+              </a:ext>
+            </a:extLst>
+          </p:cNvPr>
+          <p:cNvSpPr txBox="1"/>
+          <p:nvPr/>
+        </p:nvSpPr>
+        <p:spPr>
+          <a:xfrm>
+            <a:off x="567542" y="1216429"/>
+            <a:ext cx="6955750" cy="461665"/>
+          </a:xfrm>
+          <a:prstGeom prst="rect">
+            <a:avLst/>
+          </a:prstGeom>
+          <a:noFill/>
+        </p:spPr>
+        <p:txBody>
+          <a:bodyPr wrap="none" rtlCol="0">
+            <a:spAutoFit/>
+          </a:bodyPr>
+          <a:lstStyle/>
+          <a:p>
+            <a:r>
+              <a:rPr kumimoji="1" lang="ja-JP" altLang="en-US" sz="2400" dirty="0"/>
+              <a:t>削除は練習として最も簡単な方法で実装します。</a:t>
+            </a:r>
+            <a:endParaRPr kumimoji="1" lang="en-US" altLang="ja-JP" sz="2400" dirty="0"/>
+          </a:p>
+        </p:txBody>
+      </p:sp>
+      <p:pic>
+        <p:nvPicPr>
+          <p:cNvPr id="3" name="図 2">
+            <a:extLst>
+              <a:ext uri="{FF2B5EF4-FFF2-40B4-BE49-F238E27FC236}">
+                <a16:creationId xmlns:a16="http://schemas.microsoft.com/office/drawing/2014/main" id="{C37B6115-D61F-4664-B1E4-73846DE11DDC}"/>
+              </a:ext>
+            </a:extLst>
+          </p:cNvPr>
+          <p:cNvPicPr>
+            <a:picLocks noChangeAspect="1"/>
+          </p:cNvPicPr>
+          <p:nvPr/>
+        </p:nvPicPr>
+        <p:blipFill>
+          <a:blip r:embed="rId2"/>
+          <a:stretch>
+            <a:fillRect/>
+          </a:stretch>
+        </p:blipFill>
+        <p:spPr>
+          <a:xfrm>
+            <a:off x="567542" y="1817794"/>
+            <a:ext cx="8202170" cy="4058216"/>
+          </a:xfrm>
+          <a:prstGeom prst="rect">
+            <a:avLst/>
+          </a:prstGeom>
+        </p:spPr>
+      </p:pic>
+    </p:spTree>
+    <p:extLst>
+      <p:ext uri="{BB962C8B-B14F-4D97-AF65-F5344CB8AC3E}">
+        <p14:creationId xmlns:p14="http://schemas.microsoft.com/office/powerpoint/2010/main" val="3910093515"/>
+      </p:ext>
+    </p:extLst>
+  </p:cSld>
+  <p:clrMapOvr>
+    <a:masterClrMapping/>
+  </p:clrMapOvr>
+</p:sld>
+</file>
+
+<file path=ppt/slides/slide8.xml><?xml version="1.0" encoding="utf-8"?>
+<p:sld xmlns:a="http://schemas.openxmlformats.org/drawingml/2006/main" xmlns:r="http://schemas.openxmlformats.org/officeDocument/2006/relationships" xmlns:p="http://schemas.openxmlformats.org/presentationml/2006/main">
+  <p:cSld>
+    <p:spTree>
+      <p:nvGrpSpPr>
+        <p:cNvPr id="1" name=""/>
+        <p:cNvGrpSpPr/>
+        <p:nvPr/>
+      </p:nvGrpSpPr>
+      <p:grpSpPr>
+        <a:xfrm>
+          <a:off x="0" y="0"/>
+          <a:ext cx="0" cy="0"/>
+          <a:chOff x="0" y="0"/>
+          <a:chExt cx="0" cy="0"/>
+        </a:xfrm>
+      </p:grpSpPr>
+      <p:sp>
+        <p:nvSpPr>
+          <p:cNvPr id="4" name="テキスト ボックス 3">
+            <a:extLst>
+              <a:ext uri="{FF2B5EF4-FFF2-40B4-BE49-F238E27FC236}">
+                <a16:creationId xmlns:a16="http://schemas.microsoft.com/office/drawing/2014/main" id="{5A13BF46-B8C5-48AA-8308-C9ECFF431A18}"/>
+              </a:ext>
+            </a:extLst>
+          </p:cNvPr>
+          <p:cNvSpPr txBox="1"/>
+          <p:nvPr/>
+        </p:nvSpPr>
+        <p:spPr>
+          <a:xfrm>
+            <a:off x="567542" y="491954"/>
+            <a:ext cx="3467616" cy="584775"/>
+          </a:xfrm>
+          <a:prstGeom prst="rect">
+            <a:avLst/>
+          </a:prstGeom>
+          <a:noFill/>
+        </p:spPr>
+        <p:txBody>
+          <a:bodyPr wrap="none" rtlCol="0">
+            <a:spAutoFit/>
+          </a:bodyPr>
+          <a:lstStyle/>
+          <a:p>
+            <a:r>
+              <a:rPr kumimoji="1" lang="ja-JP" altLang="en-US" sz="3200" b="1" u="sng" dirty="0"/>
+              <a:t>接続（サーバー）</a:t>
+            </a:r>
+          </a:p>
+        </p:txBody>
+      </p:sp>
+      <p:sp>
+        <p:nvSpPr>
+          <p:cNvPr id="6" name="テキスト ボックス 5">
+            <a:extLst>
+              <a:ext uri="{FF2B5EF4-FFF2-40B4-BE49-F238E27FC236}">
+                <a16:creationId xmlns:a16="http://schemas.microsoft.com/office/drawing/2014/main" id="{55830AD6-028B-4C4E-80BF-B70DFC1C3A46}"/>
+              </a:ext>
+            </a:extLst>
+          </p:cNvPr>
+          <p:cNvSpPr txBox="1"/>
+          <p:nvPr/>
+        </p:nvSpPr>
+        <p:spPr>
+          <a:xfrm>
+            <a:off x="567542" y="1216429"/>
+            <a:ext cx="9725739" cy="830997"/>
+          </a:xfrm>
+          <a:prstGeom prst="rect">
+            <a:avLst/>
+          </a:prstGeom>
+          <a:noFill/>
+        </p:spPr>
+        <p:txBody>
+          <a:bodyPr wrap="none" rtlCol="0">
+            <a:spAutoFit/>
+          </a:bodyPr>
+          <a:lstStyle/>
+          <a:p>
+            <a:r>
+              <a:rPr kumimoji="1" lang="ja-JP" altLang="en-US" sz="2400" dirty="0"/>
+              <a:t>前回のクライアントとサーバーどちらともで実行しましょう。</a:t>
+            </a:r>
+            <a:endParaRPr kumimoji="1" lang="en-US" altLang="ja-JP" sz="2400" dirty="0"/>
+          </a:p>
+          <a:p>
+            <a:r>
+              <a:rPr lang="ja-JP" altLang="en-US" sz="2400" dirty="0"/>
+              <a:t>クライアントからサーバーへ接続、切断できるようになっています。</a:t>
+            </a:r>
+            <a:endParaRPr kumimoji="1" lang="en-US" altLang="ja-JP" sz="2400" dirty="0"/>
+          </a:p>
+        </p:txBody>
+      </p:sp>
+      <p:pic>
+        <p:nvPicPr>
+          <p:cNvPr id="10" name="図 9">
+            <a:extLst>
+              <a:ext uri="{FF2B5EF4-FFF2-40B4-BE49-F238E27FC236}">
+                <a16:creationId xmlns:a16="http://schemas.microsoft.com/office/drawing/2014/main" id="{A2CEB7A7-36D5-4BD5-B59B-3465B839B2C6}"/>
+              </a:ext>
+            </a:extLst>
+          </p:cNvPr>
+          <p:cNvPicPr>
+            <a:picLocks noChangeAspect="1"/>
+          </p:cNvPicPr>
+          <p:nvPr/>
+        </p:nvPicPr>
+        <p:blipFill>
+          <a:blip r:embed="rId2"/>
+          <a:stretch>
+            <a:fillRect/>
+          </a:stretch>
+        </p:blipFill>
+        <p:spPr>
+          <a:xfrm>
+            <a:off x="567542" y="2187125"/>
+            <a:ext cx="4803027" cy="3454445"/>
+          </a:xfrm>
+          <a:prstGeom prst="rect">
+            <a:avLst/>
+          </a:prstGeom>
+        </p:spPr>
+      </p:pic>
+      <p:pic>
+        <p:nvPicPr>
+          <p:cNvPr id="12" name="図 11">
+            <a:extLst>
+              <a:ext uri="{FF2B5EF4-FFF2-40B4-BE49-F238E27FC236}">
+                <a16:creationId xmlns:a16="http://schemas.microsoft.com/office/drawing/2014/main" id="{E07C6225-A7AE-40A8-8853-63447895EF77}"/>
+              </a:ext>
+            </a:extLst>
+          </p:cNvPr>
+          <p:cNvPicPr>
+            <a:picLocks noChangeAspect="1"/>
+          </p:cNvPicPr>
+          <p:nvPr/>
+        </p:nvPicPr>
+        <p:blipFill>
+          <a:blip r:embed="rId3"/>
+          <a:stretch>
+            <a:fillRect/>
+          </a:stretch>
+        </p:blipFill>
+        <p:spPr>
+          <a:xfrm>
+            <a:off x="5867675" y="2187125"/>
+            <a:ext cx="5510936" cy="3454445"/>
+          </a:xfrm>
+          <a:prstGeom prst="rect">
+            <a:avLst/>
+          </a:prstGeom>
+        </p:spPr>
+      </p:pic>
+      <p:sp>
+        <p:nvSpPr>
+          <p:cNvPr id="13" name="テキスト ボックス 12">
+            <a:extLst>
+              <a:ext uri="{FF2B5EF4-FFF2-40B4-BE49-F238E27FC236}">
+                <a16:creationId xmlns:a16="http://schemas.microsoft.com/office/drawing/2014/main" id="{84621944-5B98-4ED4-91C2-6166EBC6EF82}"/>
+              </a:ext>
+            </a:extLst>
+          </p:cNvPr>
+          <p:cNvSpPr txBox="1"/>
+          <p:nvPr/>
+        </p:nvSpPr>
+        <p:spPr>
+          <a:xfrm>
+            <a:off x="1799504" y="5641570"/>
+            <a:ext cx="2339102" cy="461665"/>
+          </a:xfrm>
+          <a:prstGeom prst="rect">
+            <a:avLst/>
+          </a:prstGeom>
+          <a:noFill/>
+        </p:spPr>
+        <p:txBody>
+          <a:bodyPr wrap="none" rtlCol="0">
+            <a:spAutoFit/>
+          </a:bodyPr>
+          <a:lstStyle/>
+          <a:p>
+            <a:r>
+              <a:rPr kumimoji="1" lang="ja-JP" altLang="en-US" sz="2400" b="1" dirty="0">
+                <a:solidFill>
+                  <a:srgbClr val="0070C0"/>
+                </a:solidFill>
+              </a:rPr>
+              <a:t>クライアント側</a:t>
+            </a:r>
+            <a:endParaRPr kumimoji="1" lang="en-US" altLang="ja-JP" sz="2400" b="1" dirty="0">
+              <a:solidFill>
+                <a:srgbClr val="0070C0"/>
+              </a:solidFill>
+            </a:endParaRPr>
+          </a:p>
+        </p:txBody>
+      </p:sp>
+      <p:sp>
+        <p:nvSpPr>
+          <p:cNvPr id="14" name="テキスト ボックス 13">
+            <a:extLst>
+              <a:ext uri="{FF2B5EF4-FFF2-40B4-BE49-F238E27FC236}">
+                <a16:creationId xmlns:a16="http://schemas.microsoft.com/office/drawing/2014/main" id="{D32A6056-E3C7-418A-893B-933B1B21DDBC}"/>
+              </a:ext>
+            </a:extLst>
+          </p:cNvPr>
+          <p:cNvSpPr txBox="1"/>
+          <p:nvPr/>
+        </p:nvSpPr>
+        <p:spPr>
+          <a:xfrm>
+            <a:off x="7761368" y="5631872"/>
+            <a:ext cx="1723549" cy="461665"/>
+          </a:xfrm>
+          <a:prstGeom prst="rect">
+            <a:avLst/>
+          </a:prstGeom>
+          <a:noFill/>
+        </p:spPr>
+        <p:txBody>
+          <a:bodyPr wrap="none" rtlCol="0">
+            <a:spAutoFit/>
+          </a:bodyPr>
+          <a:lstStyle/>
+          <a:p>
+            <a:r>
+              <a:rPr kumimoji="1" lang="ja-JP" altLang="en-US" sz="2400" b="1" dirty="0">
+                <a:solidFill>
+                  <a:srgbClr val="00B050"/>
+                </a:solidFill>
+              </a:rPr>
+              <a:t>サーバー側</a:t>
+            </a:r>
+            <a:endParaRPr kumimoji="1" lang="en-US" altLang="ja-JP" sz="2400" b="1" dirty="0">
+              <a:solidFill>
+                <a:srgbClr val="00B050"/>
+              </a:solidFill>
+            </a:endParaRPr>
+          </a:p>
+        </p:txBody>
+      </p:sp>
+    </p:spTree>
+    <p:extLst>
+      <p:ext uri="{BB962C8B-B14F-4D97-AF65-F5344CB8AC3E}">
+        <p14:creationId xmlns:p14="http://schemas.microsoft.com/office/powerpoint/2010/main" val="2056423648"/>
+      </p:ext>
+    </p:extLst>
+  </p:cSld>
+  <p:clrMapOvr>
+    <a:masterClrMapping/>
+  </p:clrMapOvr>
+</p:sld>
+</file>
+
+<file path=ppt/slides/slide9.xml><?xml version="1.0" encoding="utf-8"?>
+<p:sld xmlns:a="http://schemas.openxmlformats.org/drawingml/2006/main" xmlns:r="http://schemas.openxmlformats.org/officeDocument/2006/relationships" xmlns:p="http://schemas.openxmlformats.org/presentationml/2006/main">
+  <p:cSld>
+    <p:spTree>
+      <p:nvGrpSpPr>
+        <p:cNvPr id="1" name=""/>
+        <p:cNvGrpSpPr/>
+        <p:nvPr/>
+      </p:nvGrpSpPr>
+      <p:grpSpPr>
+        <a:xfrm>
+          <a:off x="0" y="0"/>
+          <a:ext cx="0" cy="0"/>
+          <a:chOff x="0" y="0"/>
+          <a:chExt cx="0" cy="0"/>
+        </a:xfrm>
+      </p:grpSpPr>
+      <p:sp>
+        <p:nvSpPr>
+          <p:cNvPr id="4" name="テキスト ボックス 3">
+            <a:extLst>
+              <a:ext uri="{FF2B5EF4-FFF2-40B4-BE49-F238E27FC236}">
+                <a16:creationId xmlns:a16="http://schemas.microsoft.com/office/drawing/2014/main" id="{5A13BF46-B8C5-48AA-8308-C9ECFF431A18}"/>
+              </a:ext>
+            </a:extLst>
+          </p:cNvPr>
+          <p:cNvSpPr txBox="1"/>
+          <p:nvPr/>
+        </p:nvSpPr>
+        <p:spPr>
+          <a:xfrm>
+            <a:off x="567542" y="491954"/>
+            <a:ext cx="3467616" cy="584775"/>
+          </a:xfrm>
+          <a:prstGeom prst="rect">
+            <a:avLst/>
+          </a:prstGeom>
+          <a:noFill/>
+        </p:spPr>
+        <p:txBody>
+          <a:bodyPr wrap="none" rtlCol="0">
+            <a:spAutoFit/>
+          </a:bodyPr>
+          <a:lstStyle/>
+          <a:p>
+            <a:r>
+              <a:rPr kumimoji="1" lang="ja-JP" altLang="en-US" sz="3200" b="1" u="sng" dirty="0"/>
+              <a:t>接続（サーバー）</a:t>
+            </a:r>
+          </a:p>
+        </p:txBody>
+      </p:sp>
+      <p:sp>
+        <p:nvSpPr>
+          <p:cNvPr id="6" name="テキスト ボックス 5">
+            <a:extLst>
+              <a:ext uri="{FF2B5EF4-FFF2-40B4-BE49-F238E27FC236}">
+                <a16:creationId xmlns:a16="http://schemas.microsoft.com/office/drawing/2014/main" id="{55830AD6-028B-4C4E-80BF-B70DFC1C3A46}"/>
+              </a:ext>
+            </a:extLst>
+          </p:cNvPr>
+          <p:cNvSpPr txBox="1"/>
+          <p:nvPr/>
+        </p:nvSpPr>
+        <p:spPr>
+          <a:xfrm>
+            <a:off x="567542" y="1216429"/>
+            <a:ext cx="8020144" cy="1200329"/>
+          </a:xfrm>
+          <a:prstGeom prst="rect">
+            <a:avLst/>
+          </a:prstGeom>
+          <a:noFill/>
+        </p:spPr>
+        <p:txBody>
+          <a:bodyPr wrap="none" rtlCol="0">
+            <a:spAutoFit/>
+          </a:bodyPr>
+          <a:lstStyle/>
+          <a:p>
+            <a:r>
+              <a:rPr kumimoji="1" lang="ja-JP" altLang="en-US" sz="2400" dirty="0"/>
+              <a:t>クライアント側の</a:t>
+            </a:r>
+            <a:r>
+              <a:rPr kumimoji="1" lang="en-US" altLang="ja-JP" sz="2400" b="1" dirty="0">
+                <a:solidFill>
+                  <a:srgbClr val="FF0000"/>
+                </a:solidFill>
+              </a:rPr>
+              <a:t>Main.cpp</a:t>
+            </a:r>
+            <a:r>
+              <a:rPr lang="ja-JP" altLang="en-US" sz="2400" dirty="0"/>
+              <a:t>の</a:t>
+            </a:r>
+            <a:r>
+              <a:rPr lang="en-US" altLang="ja-JP" sz="2400" dirty="0"/>
+              <a:t>IP</a:t>
+            </a:r>
+            <a:r>
+              <a:rPr lang="ja-JP" altLang="en-US" sz="2400" dirty="0"/>
+              <a:t>アドレスを書き換えて、</a:t>
+            </a:r>
+            <a:endParaRPr lang="en-US" altLang="ja-JP" sz="2400" dirty="0"/>
+          </a:p>
+          <a:p>
+            <a:r>
+              <a:rPr kumimoji="1" lang="ja-JP" altLang="en-US" sz="2400" dirty="0"/>
+              <a:t>他の端末にも接続できるか試してみましょう。</a:t>
+            </a:r>
+            <a:endParaRPr kumimoji="1" lang="en-US" altLang="ja-JP" sz="2400" dirty="0"/>
+          </a:p>
+          <a:p>
+            <a:r>
+              <a:rPr lang="ja-JP" altLang="en-US" sz="2400" dirty="0"/>
+              <a:t>教室内であればどの</a:t>
+            </a:r>
+            <a:r>
+              <a:rPr lang="en-US" altLang="ja-JP" sz="2400" dirty="0"/>
+              <a:t>PC</a:t>
+            </a:r>
+            <a:r>
+              <a:rPr lang="ja-JP" altLang="en-US" sz="2400" dirty="0"/>
+              <a:t>にも接続できます。</a:t>
+            </a:r>
+            <a:endParaRPr kumimoji="1" lang="en-US" altLang="ja-JP" sz="2400" dirty="0"/>
+          </a:p>
+        </p:txBody>
+      </p:sp>
+      <p:pic>
+        <p:nvPicPr>
+          <p:cNvPr id="3" name="図 2">
+            <a:extLst>
+              <a:ext uri="{FF2B5EF4-FFF2-40B4-BE49-F238E27FC236}">
+                <a16:creationId xmlns:a16="http://schemas.microsoft.com/office/drawing/2014/main" id="{BE634D6D-0D6A-4716-9537-F287912993A9}"/>
+              </a:ext>
+            </a:extLst>
+          </p:cNvPr>
+          <p:cNvPicPr>
+            <a:picLocks noChangeAspect="1"/>
+          </p:cNvPicPr>
+          <p:nvPr/>
+        </p:nvPicPr>
+        <p:blipFill>
+          <a:blip r:embed="rId2"/>
+          <a:stretch>
+            <a:fillRect/>
+          </a:stretch>
+        </p:blipFill>
+        <p:spPr>
+          <a:xfrm>
+            <a:off x="567542" y="2556458"/>
+            <a:ext cx="8023571" cy="2523542"/>
+          </a:xfrm>
+          <a:prstGeom prst="rect">
+            <a:avLst/>
+          </a:prstGeom>
+        </p:spPr>
+      </p:pic>
+    </p:spTree>
+    <p:extLst>
+      <p:ext uri="{BB962C8B-B14F-4D97-AF65-F5344CB8AC3E}">
+        <p14:creationId xmlns:p14="http://schemas.microsoft.com/office/powerpoint/2010/main" val="2712991985"/>
+      </p:ext>
+    </p:extLst>
+  </p:cSld>
+  <p:clrMapOvr>
+    <a:masterClrMapping/>
+  </p:clrMapOvr>
+</p:sld>
+</file>
+
 <file path=ppt/theme/theme1.xml><?xml version="1.0" encoding="utf-8"?>
 <a:theme xmlns:a="http://schemas.openxmlformats.org/drawingml/2006/main" name="Office テーマ">
   <a:themeElements>
